--- a/decks/maths-speed/maths-speed_ch1_units-of-time.pptx
+++ b/decks/maths-speed/maths-speed_ch1_units-of-time.pptx
@@ -122,29 +122,29 @@
   <p:extLst>
     <p:ext uri="{521415D9-36F7-43E2-AB2F-B90AF26B5E84}">
       <p14:sectionLst xmlns:p14="http://schemas.microsoft.com/office/powerpoint/2010/main">
-        <p14:section name="Opening" id="{96e298f3-4882-778f-9885-16616268a90c}">
+        <p14:section name="Opening" id="{139bcfe8-9093-4a40-61af-9d14192887b9}">
           <p14:sldIdLst>
             <p14:sldId id="256"/>
           </p14:sldIdLst>
         </p14:section>
-        <p14:section name="Gate" id="{1c7ee69f-e77f-e338-4de6-ca4af90e592f}">
+        <p14:section name="Gate" id="{f5be42a2-3d91-0551-e377-43baac6748b9}">
           <p14:sldIdLst>
             <p14:sldId id="257"/>
             <p14:sldId id="258"/>
           </p14:sldIdLst>
         </p14:section>
-        <p14:section name="Pre-teach" id="{de5ed5c8-8dc0-5333-ba32-31ae405ab014}">
+        <p14:section name="Pre-teach" id="{e9805cac-e535-454a-0977-f1d663e07cad}">
           <p14:sldIdLst>
             <p14:sldId id="259"/>
           </p14:sldIdLst>
         </p14:section>
-        <p14:section name="Read-along" id="{257924a4-fefa-1171-cc80-88d8ba81482f}">
+        <p14:section name="Read-along" id="{4ff3febd-0078-af2e-e5bb-c0140044ad00}">
           <p14:sldIdLst>
             <p14:sldId id="260"/>
             <p14:sldId id="261"/>
           </p14:sldIdLst>
         </p14:section>
-        <p14:section name="Teach" id="{750ad89a-ae9d-ee44-922e-bb9271b292e7}">
+        <p14:section name="Teach" id="{8abcc411-7945-8db8-21a7-b2abafad2670}">
           <p14:sldIdLst>
             <p14:sldId id="262"/>
             <p14:sldId id="263"/>
@@ -152,18 +152,18 @@
             <p14:sldId id="265"/>
           </p14:sldIdLst>
         </p14:section>
-        <p14:section name="Routes" id="{13cb617a-757c-9592-26c0-93f7bd58d978}">
+        <p14:section name="Routes" id="{edc9802b-8869-d6fe-2f4a-6b0e7dc5f229}">
           <p14:sldIdLst>
             <p14:sldId id="266"/>
             <p14:sldId id="267"/>
           </p14:sldIdLst>
         </p14:section>
-        <p14:section name="Close" id="{6a443931-ed22-1b51-410c-e75503924163}">
+        <p14:section name="Close" id="{26c941f7-bd51-8fad-2a83-97681a7fb92b}">
           <p14:sldIdLst>
             <p14:sldId id="268"/>
           </p14:sldIdLst>
         </p14:section>
-        <p14:section name="Answers" id="{bc7a2590-9c09-54df-20eb-87c7459a4896}">
+        <p14:section name="Answers" id="{cc33f70a-d5bb-2355-dfcc-f8a7a3cd6d66}">
           <p14:sldIdLst>
             <p14:sldId id="269"/>
             <p14:sldId id="270"/>
@@ -1130,7 +1130,7 @@
             <a:r>
               <a:rPr lang="en-US" dirty="0"/>
               <a:t>Answers — task 2: Days and hours. Reveal the answer; pupils mark their own work in a different colour, then read the "why" together. Same destination for every lane, so one answer serves the whole class.
-Answer: A   4 days 4 hours
+Answer: B   4 days 4 hours
 Why: 4 days is 4 × 24 = 96 hours. 100 − 96 = 4, so 100 hours is 4 days and 4 hours.
 Ask a Support pupil to explain one step, and a Stretch pupil to share their extension.</a:t>
             </a:r>
@@ -6060,6 +6060,34 @@
                 <a:ea typeface="Calibri" pitchFamily="34" charset="-122"/>
                 <a:cs typeface="Calibri" pitchFamily="34" charset="-120"/>
               </a:rPr>
+              <a:t>4 days 16 hours      </a:t>
+            </a:r>
+            <a:pPr algn="ctr" indent="0" marL="0">
+              <a:buNone/>
+            </a:pPr>
+            <a:r>
+              <a:rPr lang="en-US" sz="1800" b="1" dirty="0">
+                <a:solidFill>
+                  <a:srgbClr val="B8862B"/>
+                </a:solidFill>
+                <a:latin typeface="Calibri" pitchFamily="34" charset="0"/>
+                <a:ea typeface="Calibri" pitchFamily="34" charset="-122"/>
+                <a:cs typeface="Calibri" pitchFamily="34" charset="-120"/>
+              </a:rPr>
+              <a:t>B  </a:t>
+            </a:r>
+            <a:pPr algn="ctr" indent="0" marL="0">
+              <a:buNone/>
+            </a:pPr>
+            <a:r>
+              <a:rPr lang="en-US" sz="1800" dirty="0">
+                <a:solidFill>
+                  <a:srgbClr val="1E2229"/>
+                </a:solidFill>
+                <a:latin typeface="Calibri" pitchFamily="34" charset="0"/>
+                <a:ea typeface="Calibri" pitchFamily="34" charset="-122"/>
+                <a:cs typeface="Calibri" pitchFamily="34" charset="-120"/>
+              </a:rPr>
               <a:t>4 days 4 hours      </a:t>
             </a:r>
             <a:pPr algn="ctr" indent="0" marL="0">
@@ -6074,7 +6102,7 @@
                 <a:ea typeface="Calibri" pitchFamily="34" charset="-122"/>
                 <a:cs typeface="Calibri" pitchFamily="34" charset="-120"/>
               </a:rPr>
-              <a:t>B  </a:t>
+              <a:t>C  </a:t>
             </a:r>
             <a:pPr algn="ctr" indent="0" marL="0">
               <a:buNone/>
@@ -6089,34 +6117,6 @@
                 <a:cs typeface="Calibri" pitchFamily="34" charset="-120"/>
               </a:rPr>
               <a:t>10 days      </a:t>
-            </a:r>
-            <a:pPr algn="ctr" indent="0" marL="0">
-              <a:buNone/>
-            </a:pPr>
-            <a:r>
-              <a:rPr lang="en-US" sz="1800" b="1" dirty="0">
-                <a:solidFill>
-                  <a:srgbClr val="B8862B"/>
-                </a:solidFill>
-                <a:latin typeface="Calibri" pitchFamily="34" charset="0"/>
-                <a:ea typeface="Calibri" pitchFamily="34" charset="-122"/>
-                <a:cs typeface="Calibri" pitchFamily="34" charset="-120"/>
-              </a:rPr>
-              <a:t>C  </a:t>
-            </a:r>
-            <a:pPr algn="ctr" indent="0" marL="0">
-              <a:buNone/>
-            </a:pPr>
-            <a:r>
-              <a:rPr lang="en-US" sz="1800" dirty="0">
-                <a:solidFill>
-                  <a:srgbClr val="1E2229"/>
-                </a:solidFill>
-                <a:latin typeface="Calibri" pitchFamily="34" charset="0"/>
-                <a:ea typeface="Calibri" pitchFamily="34" charset="-122"/>
-                <a:cs typeface="Calibri" pitchFamily="34" charset="-120"/>
-              </a:rPr>
-              <a:t>4 days 16 hours      </a:t>
             </a:r>
             <a:pPr algn="ctr" indent="0" marL="0">
               <a:buNone/>
@@ -7961,7 +7961,7 @@
                 <a:ea typeface="Cambria" pitchFamily="34" charset="-122"/>
                 <a:cs typeface="Cambria" pitchFamily="34" charset="-120"/>
               </a:rPr>
-              <a:t>A   4 days 4 hours</a:t>
+              <a:t>B   4 days 4 hours</a:t>
             </a:r>
             <a:endParaRPr lang="en-US" sz="1800" dirty="0"/>
           </a:p>
@@ -9152,7 +9152,7 @@
                 <a:ea typeface="Calibri" pitchFamily="34" charset="-122"/>
                 <a:cs typeface="Calibri" pitchFamily="34" charset="-120"/>
               </a:rPr>
-              <a:t>0.45 hours</a:t>
+              <a:t>½ an hour</a:t>
             </a:r>
             <a:endParaRPr lang="en-US" sz="2400" dirty="0"/>
           </a:p>
@@ -9263,7 +9263,7 @@
                 <a:ea typeface="Calibri" pitchFamily="34" charset="-122"/>
                 <a:cs typeface="Calibri" pitchFamily="34" charset="-120"/>
               </a:rPr>
-              <a:t>½ an hour</a:t>
+              <a:t>0.45 hours</a:t>
             </a:r>
             <a:endParaRPr lang="en-US" sz="2400" dirty="0"/>
           </a:p>

--- a/decks/maths-speed/maths-speed_ch1_units-of-time.pptx
+++ b/decks/maths-speed/maths-speed_ch1_units-of-time.pptx
@@ -122,29 +122,29 @@
   <p:extLst>
     <p:ext uri="{521415D9-36F7-43E2-AB2F-B90AF26B5E84}">
       <p14:sectionLst xmlns:p14="http://schemas.microsoft.com/office/powerpoint/2010/main">
-        <p14:section name="Opening" id="{139bcfe8-9093-4a40-61af-9d14192887b9}">
+        <p14:section name="Opening" id="{7b3be789-12e7-0a71-5be5-c8e19783b33e}">
           <p14:sldIdLst>
             <p14:sldId id="256"/>
           </p14:sldIdLst>
         </p14:section>
-        <p14:section name="Gate" id="{f5be42a2-3d91-0551-e377-43baac6748b9}">
+        <p14:section name="Gate" id="{bce4468a-6dc1-38fe-06dc-4a00b355a0f1}">
           <p14:sldIdLst>
             <p14:sldId id="257"/>
             <p14:sldId id="258"/>
           </p14:sldIdLst>
         </p14:section>
-        <p14:section name="Pre-teach" id="{e9805cac-e535-454a-0977-f1d663e07cad}">
+        <p14:section name="Pre-teach" id="{20369a8f-3d99-447d-1048-3e48f80303f5}">
           <p14:sldIdLst>
             <p14:sldId id="259"/>
           </p14:sldIdLst>
         </p14:section>
-        <p14:section name="Read-along" id="{4ff3febd-0078-af2e-e5bb-c0140044ad00}">
+        <p14:section name="Read-along" id="{30cd8d7b-da36-0e38-63f2-0880c7d49d38}">
           <p14:sldIdLst>
             <p14:sldId id="260"/>
             <p14:sldId id="261"/>
           </p14:sldIdLst>
         </p14:section>
-        <p14:section name="Teach" id="{8abcc411-7945-8db8-21a7-b2abafad2670}">
+        <p14:section name="Teach" id="{18e46bd0-fbc0-3636-1953-e96de42cfe43}">
           <p14:sldIdLst>
             <p14:sldId id="262"/>
             <p14:sldId id="263"/>
@@ -152,18 +152,18 @@
             <p14:sldId id="265"/>
           </p14:sldIdLst>
         </p14:section>
-        <p14:section name="Routes" id="{edc9802b-8869-d6fe-2f4a-6b0e7dc5f229}">
+        <p14:section name="Routes" id="{18dfe334-c87d-fe67-043d-8c04170b6413}">
           <p14:sldIdLst>
             <p14:sldId id="266"/>
             <p14:sldId id="267"/>
           </p14:sldIdLst>
         </p14:section>
-        <p14:section name="Close" id="{26c941f7-bd51-8fad-2a83-97681a7fb92b}">
+        <p14:section name="Close" id="{e34f63e2-e762-6683-f26e-0771662577a4}">
           <p14:sldIdLst>
             <p14:sldId id="268"/>
           </p14:sldIdLst>
         </p14:section>
-        <p14:section name="Answers" id="{cc33f70a-d5bb-2355-dfcc-f8a7a3cd6d66}">
+        <p14:section name="Answers" id="{9238a0bb-c675-3f26-abaf-f4c2410d6ddc}">
           <p14:sldIdLst>
             <p14:sldId id="269"/>
             <p14:sldId id="270"/>
